--- a/classes/parte-0-fundamentos-y-prerrequisitos/006-linea-de-comandos-linux-avanzada-grep-sed-awk-pipes-y-procesos/clase-006-presentacion.pptx
+++ b/classes/parte-0-fundamentos-y-prerrequisitos/006-linea-de-comandos-linux-avanzada-grep-sed-awk-pipes-y-procesos/clase-006-presentacion.pptx
@@ -17,6 +17,11 @@
     <p:sldId id="265" r:id="rId16"/>
     <p:sldId id="266" r:id="rId17"/>
     <p:sldId id="267" r:id="rId18"/>
+    <p:sldId id="268" r:id="rId19"/>
+    <p:sldId id="269" r:id="rId20"/>
+    <p:sldId id="270" r:id="rId21"/>
+    <p:sldId id="271" r:id="rId22"/>
+    <p:sldId id="272" r:id="rId23"/>
   </p:sldIdLst>
   <p:sldSz cx="9144000" cy="6858000" type="screen4x3"/>
   <p:notesSz cx="6858000" cy="9144000"/>
@@ -3198,7 +3203,7 @@
                   <a:srgbClr val="0B3D2E"/>
                 </a:solidFill>
               </a:rPr>
-              <a:t>⚠️ Errores comunes</a:t>
+              <a:t>✍️ Ejercicios</a:t>
             </a:r>
           </a:p>
         </p:txBody>
@@ -3236,67 +3241,97 @@
                   <a:srgbClr val="22282E"/>
                 </a:solidFill>
               </a:rPr>
-              <a:t>•  grep no encuentra lo que ves en pantalla — Regex mal escrita o mayúsculas. Prueba -i y escapa caracteres especiales.</a:t>
-            </a:r>
-          </a:p>
-          <a:p>
-            <a:pPr>
-              <a:spcAft>
-                <a:spcPts val="600"/>
-              </a:spcAft>
-            </a:pPr>
-            <a:r>
-              <a:rPr sz="1500">
-                <a:solidFill>
-                  <a:srgbClr val="22282E"/>
-                </a:solidFill>
-              </a:rPr>
-              <a:t>•  awk imprime campo vacío — El separador no es el esperado. Usa -F para fijar el delimitador (-F:).</a:t>
-            </a:r>
-          </a:p>
-          <a:p>
-            <a:pPr>
-              <a:spcAft>
-                <a:spcPts val="600"/>
-              </a:spcAft>
-            </a:pPr>
-            <a:r>
-              <a:rPr sz="1500">
-                <a:solidFill>
-                  <a:srgbClr val="22282E"/>
-                </a:solidFill>
-              </a:rPr>
-              <a:t>•  sed -i corrompe o vacía el archivo — Editaste in-place sin copia. Prueba primero sin -i y guarda backup con -i.bak.</a:t>
-            </a:r>
-          </a:p>
-          <a:p>
-            <a:pPr>
-              <a:spcAft>
-                <a:spcPts val="600"/>
-              </a:spcAft>
-            </a:pPr>
-            <a:r>
-              <a:rPr sz="1500">
-                <a:solidFill>
-                  <a:srgbClr val="22282E"/>
-                </a:solidFill>
-              </a:rPr>
-              <a:t>•  kill no mata el proceso — Ignora SIGTERM. Usa kill -9 (SIGKILL) como último recurso.</a:t>
-            </a:r>
-          </a:p>
-          <a:p>
-            <a:pPr>
-              <a:spcAft>
-                <a:spcPts val="600"/>
-              </a:spcAft>
-            </a:pPr>
-            <a:r>
-              <a:rPr sz="1500">
-                <a:solidFill>
-                  <a:srgbClr val="22282E"/>
-                </a:solidFill>
-              </a:rPr>
-              <a:t>•  El pipe pierde los errores — stderr no viaja por el pipe; redirígelo con 2&gt;&amp;1 si lo necesitas.</a:t>
+              <a:t>•  A partir de un access.log, obtén el top 10 de IPs con más peticiones.</a:t>
+            </a:r>
+          </a:p>
+          <a:p>
+            <a:pPr>
+              <a:spcAft>
+                <a:spcPts val="600"/>
+              </a:spcAft>
+            </a:pPr>
+            <a:r>
+              <a:rPr sz="1500">
+                <a:solidFill>
+                  <a:srgbClr val="22282E"/>
+                </a:solidFill>
+              </a:rPr>
+              <a:t>•  Cuenta cuántas peticiones devolvieron código 404 usando exclusivamente awk.</a:t>
+            </a:r>
+          </a:p>
+          <a:p>
+            <a:pPr>
+              <a:spcAft>
+                <a:spcPts val="600"/>
+              </a:spcAft>
+            </a:pPr>
+            <a:r>
+              <a:rPr sz="1500">
+                <a:solidFill>
+                  <a:srgbClr val="22282E"/>
+                </a:solidFill>
+              </a:rPr>
+              <a:t>•  Con sed, cambia todas las apariciones de http:// por https:// en un archivo, conservando un respaldo .bak.</a:t>
+            </a:r>
+          </a:p>
+          <a:p>
+            <a:pPr>
+              <a:spcAft>
+                <a:spcPts val="600"/>
+              </a:spcAft>
+            </a:pPr>
+            <a:r>
+              <a:rPr sz="1500">
+                <a:solidFill>
+                  <a:srgbClr val="22282E"/>
+                </a:solidFill>
+              </a:rPr>
+              <a:t>•  Extrae solo los nombres de usuario con shell /bin/bash de /etc/passwd en un one-liner.</a:t>
+            </a:r>
+          </a:p>
+          <a:p>
+            <a:pPr>
+              <a:spcAft>
+                <a:spcPts val="600"/>
+              </a:spcAft>
+            </a:pPr>
+            <a:r>
+              <a:rPr sz="1500">
+                <a:solidFill>
+                  <a:srgbClr val="22282E"/>
+                </a:solidFill>
+              </a:rPr>
+              <a:t>•  Muestra los 5 procesos que más memoria residente (RSS) consumen, con usuario y PID.</a:t>
+            </a:r>
+          </a:p>
+          <a:p>
+            <a:pPr>
+              <a:spcAft>
+                <a:spcPts val="600"/>
+              </a:spcAft>
+            </a:pPr>
+            <a:r>
+              <a:rPr sz="1500">
+                <a:solidFill>
+                  <a:srgbClr val="22282E"/>
+                </a:solidFill>
+              </a:rPr>
+              <a:t>•  Combina grep, sort y uniq -c para contar user-agents distintos en un log web.</a:t>
+            </a:r>
+          </a:p>
+          <a:p>
+            <a:pPr>
+              <a:spcAft>
+                <a:spcPts val="600"/>
+              </a:spcAft>
+            </a:pPr>
+            <a:r>
+              <a:rPr sz="1500">
+                <a:solidFill>
+                  <a:srgbClr val="22282E"/>
+                </a:solidFill>
+              </a:rPr>
+              <a:t>•  Usando awk con un array asociativo, calcula cuántas peticiones hizo cada IP en una sola pasada (sin sort/uniq).</a:t>
             </a:r>
           </a:p>
         </p:txBody>
@@ -3347,7 +3382,7 @@
                   <a:srgbClr val="0B3D2E"/>
                 </a:solidFill>
               </a:rPr>
-              <a:t>❓ Preguntas frecuentes</a:t>
+              <a:t>📝 Reto verificable</a:t>
             </a:r>
           </a:p>
         </p:txBody>
@@ -3385,52 +3420,22 @@
                   <a:srgbClr val="22282E"/>
                 </a:solidFill>
               </a:rPr>
-              <a:t>•  ❓ ¿grep, sed o awk? grep filtra, sed transforma línea a línea, awk procesa por columnas y agrega. Para contar/estadística por campos, awk; para sustituir texto, sed; para buscar, grep.</a:t>
-            </a:r>
-          </a:p>
-          <a:p>
-            <a:pPr>
-              <a:spcAft>
-                <a:spcPts val="600"/>
-              </a:spcAft>
-            </a:pPr>
-            <a:r>
-              <a:rPr sz="1500">
-                <a:solidFill>
-                  <a:srgbClr val="22282E"/>
-                </a:solidFill>
-              </a:rPr>
-              <a:t>•  ❓ ¿kill -9 siempre es mejor? No. SIGKILL no deja al proceso limpiar (archivos temporales, sockets). Usa primero SIGTERM; reserva -9 para procesos colgados.</a:t>
-            </a:r>
-          </a:p>
-          <a:p>
-            <a:pPr>
-              <a:spcAft>
-                <a:spcPts val="600"/>
-              </a:spcAft>
-            </a:pPr>
-            <a:r>
-              <a:rPr sz="1500">
-                <a:solidFill>
-                  <a:srgbClr val="22282E"/>
-                </a:solidFill>
-              </a:rPr>
-              <a:t>•  ❓ ¿Por qué mi one-liner es lento con archivos enormes? Ordenar y varias pasadas cuestan. Filtra pronto con grep, reduce datos antes de sort, y considera awk para hacerlo todo en una pasada.</a:t>
-            </a:r>
-          </a:p>
-          <a:p>
-            <a:pPr>
-              <a:spcAft>
-                <a:spcPts val="600"/>
-              </a:spcAft>
-            </a:pPr>
-            <a:r>
-              <a:rPr sz="1500">
-                <a:solidFill>
-                  <a:srgbClr val="22282E"/>
-                </a:solidFill>
-              </a:rPr>
-              <a:t>•  ❓ ¿Necesito aprender regex a fondo? Lo básico ya multiplica tu productividad; en la Clase 019 profundizamos en expresiones regulares para logs y datos.</a:t>
+              <a:t>•  Escribe una única línea (one-liner) que, a partir de un log de acceso web, produzca un informe ordenado del top 10 de IPs por número de peticiones excluyendo las de tu propia red interna. Documenta…</a:t>
+            </a:r>
+          </a:p>
+          <a:p>
+            <a:pPr>
+              <a:spcAft>
+                <a:spcPts val="600"/>
+              </a:spcAft>
+            </a:pPr>
+            <a:r>
+              <a:rPr sz="1500">
+                <a:solidFill>
+                  <a:srgbClr val="22282E"/>
+                </a:solidFill>
+              </a:rPr>
+              <a:t>•  Criterio de aceptación: el one-liner ejecuta sin errores sobre un access.log real y su salida es una lista de exactamente hasta 10 IPs con su conteo, ordenadas de mayor a menor y sin incluir la…</a:t>
             </a:r>
           </a:p>
         </p:txBody>
@@ -3481,7 +3486,7 @@
                   <a:srgbClr val="0B3D2E"/>
                 </a:solidFill>
               </a:rPr>
-              <a:t>🔗 Referencias</a:t>
+              <a:t>⚠️ Errores comunes</a:t>
             </a:r>
           </a:p>
         </p:txBody>
@@ -3519,6 +3524,304 @@
                   <a:srgbClr val="22282E"/>
                 </a:solidFill>
               </a:rPr>
+              <a:t>•  grep no encuentra lo que ves en pantalla — Regex mal escrita o diferencia de mayúsculas. Prueba -i y escapa metacaracteres, o usa -E para ERE.</a:t>
+            </a:r>
+          </a:p>
+          <a:p>
+            <a:pPr>
+              <a:spcAft>
+                <a:spcPts val="600"/>
+              </a:spcAft>
+            </a:pPr>
+            <a:r>
+              <a:rPr sz="1500">
+                <a:solidFill>
+                  <a:srgbClr val="22282E"/>
+                </a:solidFill>
+              </a:rPr>
+              <a:t>•  awk imprime campo vacío — El separador no es el esperado. Fija el delimitador con -F (por ejemplo -F:).</a:t>
+            </a:r>
+          </a:p>
+          <a:p>
+            <a:pPr>
+              <a:spcAft>
+                <a:spcPts val="600"/>
+              </a:spcAft>
+            </a:pPr>
+            <a:r>
+              <a:rPr sz="1500">
+                <a:solidFill>
+                  <a:srgbClr val="22282E"/>
+                </a:solidFill>
+              </a:rPr>
+              <a:t>•  sed -i corrompe o vacía el archivo — Editaste en sitio sin copia. Prueba primero sin -i y usa -i.bak para guardar respaldo.</a:t>
+            </a:r>
+          </a:p>
+          <a:p>
+            <a:pPr>
+              <a:spcAft>
+                <a:spcPts val="600"/>
+              </a:spcAft>
+            </a:pPr>
+            <a:r>
+              <a:rPr sz="1500">
+                <a:solidFill>
+                  <a:srgbClr val="22282E"/>
+                </a:solidFill>
+              </a:rPr>
+              <a:t>•  kill no termina el proceso — El proceso ignora SIGTERM o está en estado no interrumpible. Usa kill -9 (SIGKILL) solo como último recurso.</a:t>
+            </a:r>
+          </a:p>
+          <a:p>
+            <a:pPr>
+              <a:spcAft>
+                <a:spcPts val="600"/>
+              </a:spcAft>
+            </a:pPr>
+            <a:r>
+              <a:rPr sz="1500">
+                <a:solidFill>
+                  <a:srgbClr val="22282E"/>
+                </a:solidFill>
+              </a:rPr>
+              <a:t>•  El pipe "pierde" los errores — stderr no viaja por el pipe. Redirígelo con 2&gt;&amp;1 antes del \</a:t>
+            </a:r>
+          </a:p>
+          <a:p>
+            <a:pPr>
+              <a:spcAft>
+                <a:spcPts val="600"/>
+              </a:spcAft>
+            </a:pPr>
+            <a:r>
+              <a:rPr sz="1500">
+                <a:solidFill>
+                  <a:srgbClr val="22282E"/>
+                </a:solidFill>
+              </a:rPr>
+              <a:t>•  El one-liner es lentísimo con archivos enormes — Ordenas o procesas demasiados datos. Filtra con grep al inicio y reduce antes de sort.</a:t>
+            </a:r>
+          </a:p>
+        </p:txBody>
+      </p:sp>
+    </p:spTree>
+  </p:cSld>
+  <p:clrMapOvr>
+    <a:masterClrMapping/>
+  </p:clrMapOvr>
+</p:sld>
+</file>
+
+<file path=ppt/slides/slide13.xml><?xml version="1.0" encoding="utf-8"?>
+<p:sld xmlns:a="http://schemas.openxmlformats.org/drawingml/2006/main" xmlns:p="http://schemas.openxmlformats.org/presentationml/2006/main" xmlns:r="http://schemas.openxmlformats.org/officeDocument/2006/relationships">
+  <p:cSld>
+    <p:spTree>
+      <p:nvGrpSpPr>
+        <p:cNvPr id="1" name=""/>
+        <p:cNvGrpSpPr/>
+        <p:nvPr/>
+      </p:nvGrpSpPr>
+      <p:grpSpPr/>
+      <p:sp>
+        <p:nvSpPr>
+          <p:cNvPr id="2" name="TextBox 1"/>
+          <p:cNvSpPr txBox="1"/>
+          <p:nvPr/>
+        </p:nvSpPr>
+        <p:spPr>
+          <a:xfrm>
+            <a:off x="457200" y="320040"/>
+            <a:ext cx="8229600" cy="822960"/>
+          </a:xfrm>
+          <a:prstGeom prst="rect">
+            <a:avLst/>
+          </a:prstGeom>
+          <a:noFill/>
+        </p:spPr>
+        <p:txBody>
+          <a:bodyPr wrap="square">
+            <a:spAutoFit/>
+          </a:bodyPr>
+          <a:lstStyle/>
+          <a:p>
+            <a:r>
+              <a:rPr sz="2600" b="1">
+                <a:solidFill>
+                  <a:srgbClr val="0B3D2E"/>
+                </a:solidFill>
+              </a:rPr>
+              <a:t>❓ Preguntas frecuentes</a:t>
+            </a:r>
+          </a:p>
+        </p:txBody>
+      </p:sp>
+      <p:sp>
+        <p:nvSpPr>
+          <p:cNvPr id="3" name="TextBox 2"/>
+          <p:cNvSpPr txBox="1"/>
+          <p:nvPr/>
+        </p:nvSpPr>
+        <p:spPr>
+          <a:xfrm>
+            <a:off x="457200" y="1280160"/>
+            <a:ext cx="8229600" cy="4937760"/>
+          </a:xfrm>
+          <a:prstGeom prst="rect">
+            <a:avLst/>
+          </a:prstGeom>
+          <a:noFill/>
+        </p:spPr>
+        <p:txBody>
+          <a:bodyPr wrap="square">
+            <a:spAutoFit/>
+          </a:bodyPr>
+          <a:lstStyle/>
+          <a:p>
+            <a:pPr>
+              <a:spcAft>
+                <a:spcPts val="600"/>
+              </a:spcAft>
+            </a:pPr>
+            <a:r>
+              <a:rPr sz="1500">
+                <a:solidFill>
+                  <a:srgbClr val="22282E"/>
+                </a:solidFill>
+              </a:rPr>
+              <a:t>•  ❓ ¿grep, sed o awk? grep filtra líneas, sed transforma línea a línea, y awk procesa por columnas y calcula agregados. Para buscar, usa grep; para sustituir texto, sed; para contar, sumar o…</a:t>
+            </a:r>
+          </a:p>
+          <a:p>
+            <a:pPr>
+              <a:spcAft>
+                <a:spcPts val="600"/>
+              </a:spcAft>
+            </a:pPr>
+            <a:r>
+              <a:rPr sz="1500">
+                <a:solidFill>
+                  <a:srgbClr val="22282E"/>
+                </a:solidFill>
+              </a:rPr>
+              <a:t>•  ❓ ¿kill -9 siempre es mejor? No. SIGKILL no deja al proceso limpiar sus recursos (archivos temporales, sockets, bloqueos), lo que puede dejar el sistema inconsistente. Envía primero SIGTERM (el kill…</a:t>
+            </a:r>
+          </a:p>
+          <a:p>
+            <a:pPr>
+              <a:spcAft>
+                <a:spcPts val="600"/>
+              </a:spcAft>
+            </a:pPr>
+            <a:r>
+              <a:rPr sz="1500">
+                <a:solidFill>
+                  <a:srgbClr val="22282E"/>
+                </a:solidFill>
+              </a:rPr>
+              <a:t>•  ❓ ¿Por qué mi one-liner es lento con archivos enormes? Porque ordenas o procesas demasiado volumen. sort carga datos en memoria y varias pasadas cuestan. Filtra pronto con grep, reduce los datos…</a:t>
+            </a:r>
+          </a:p>
+          <a:p>
+            <a:pPr>
+              <a:spcAft>
+                <a:spcPts val="600"/>
+              </a:spcAft>
+            </a:pPr>
+            <a:r>
+              <a:rPr sz="1500">
+                <a:solidFill>
+                  <a:srgbClr val="22282E"/>
+                </a:solidFill>
+              </a:rPr>
+              <a:t>•  ❓ ¿Necesito aprender regex a fondo? Lo básico ya multiplica tu productividad, pero conviene entender la diferencia entre BRE y ERE para no pelearte con los escapes. En la Clase 019 se profundiza en…</a:t>
+            </a:r>
+          </a:p>
+        </p:txBody>
+      </p:sp>
+    </p:spTree>
+  </p:cSld>
+  <p:clrMapOvr>
+    <a:masterClrMapping/>
+  </p:clrMapOvr>
+</p:sld>
+</file>
+
+<file path=ppt/slides/slide14.xml><?xml version="1.0" encoding="utf-8"?>
+<p:sld xmlns:a="http://schemas.openxmlformats.org/drawingml/2006/main" xmlns:p="http://schemas.openxmlformats.org/presentationml/2006/main" xmlns:r="http://schemas.openxmlformats.org/officeDocument/2006/relationships">
+  <p:cSld>
+    <p:spTree>
+      <p:nvGrpSpPr>
+        <p:cNvPr id="1" name=""/>
+        <p:cNvGrpSpPr/>
+        <p:nvPr/>
+      </p:nvGrpSpPr>
+      <p:grpSpPr/>
+      <p:sp>
+        <p:nvSpPr>
+          <p:cNvPr id="2" name="TextBox 1"/>
+          <p:cNvSpPr txBox="1"/>
+          <p:nvPr/>
+        </p:nvSpPr>
+        <p:spPr>
+          <a:xfrm>
+            <a:off x="457200" y="320040"/>
+            <a:ext cx="8229600" cy="822960"/>
+          </a:xfrm>
+          <a:prstGeom prst="rect">
+            <a:avLst/>
+          </a:prstGeom>
+          <a:noFill/>
+        </p:spPr>
+        <p:txBody>
+          <a:bodyPr wrap="square">
+            <a:spAutoFit/>
+          </a:bodyPr>
+          <a:lstStyle/>
+          <a:p>
+            <a:r>
+              <a:rPr sz="2600" b="1">
+                <a:solidFill>
+                  <a:srgbClr val="0B3D2E"/>
+                </a:solidFill>
+              </a:rPr>
+              <a:t>🔗 Referencias</a:t>
+            </a:r>
+          </a:p>
+        </p:txBody>
+      </p:sp>
+      <p:sp>
+        <p:nvSpPr>
+          <p:cNvPr id="3" name="TextBox 2"/>
+          <p:cNvSpPr txBox="1"/>
+          <p:nvPr/>
+        </p:nvSpPr>
+        <p:spPr>
+          <a:xfrm>
+            <a:off x="457200" y="1280160"/>
+            <a:ext cx="8229600" cy="4937760"/>
+          </a:xfrm>
+          <a:prstGeom prst="rect">
+            <a:avLst/>
+          </a:prstGeom>
+          <a:noFill/>
+        </p:spPr>
+        <p:txBody>
+          <a:bodyPr wrap="square">
+            <a:spAutoFit/>
+          </a:bodyPr>
+          <a:lstStyle/>
+          <a:p>
+            <a:pPr>
+              <a:spcAft>
+                <a:spcPts val="600"/>
+              </a:spcAft>
+            </a:pPr>
+            <a:r>
+              <a:rPr sz="1500">
+                <a:solidFill>
+                  <a:srgbClr val="22282E"/>
+                </a:solidFill>
+              </a:rPr>
               <a:t>•  William Shotts, The Linux Command Line — &lt;https://linuxcommand.org/tlcl.php&gt;</a:t>
             </a:r>
           </a:p>
@@ -3564,11 +3867,251 @@
                   <a:srgbClr val="22282E"/>
                 </a:solidFill>
               </a:rPr>
-              <a:t>•  man 7 signal</a:t>
-            </a:r>
-          </a:p>
-        </p:txBody>
-      </p:sp>
+              <a:t>•  GNU sed manual — &lt;https://www.gnu.org/software/sed/manual/&gt;</a:t>
+            </a:r>
+          </a:p>
+          <a:p>
+            <a:pPr>
+              <a:spcAft>
+                <a:spcPts val="600"/>
+              </a:spcAft>
+            </a:pPr>
+            <a:r>
+              <a:rPr sz="1500">
+                <a:solidFill>
+                  <a:srgbClr val="22282E"/>
+                </a:solidFill>
+              </a:rPr>
+              <a:t>•  man 7 signal — semántica de las señales POSIX</a:t>
+            </a:r>
+          </a:p>
+        </p:txBody>
+      </p:sp>
+    </p:spTree>
+  </p:cSld>
+  <p:clrMapOvr>
+    <a:masterClrMapping/>
+  </p:clrMapOvr>
+</p:sld>
+</file>
+
+<file path=ppt/slides/slide15.xml><?xml version="1.0" encoding="utf-8"?>
+<p:sld xmlns:a="http://schemas.openxmlformats.org/drawingml/2006/main" xmlns:p="http://schemas.openxmlformats.org/presentationml/2006/main" xmlns:r="http://schemas.openxmlformats.org/officeDocument/2006/relationships">
+  <p:cSld>
+    <p:spTree>
+      <p:nvGrpSpPr>
+        <p:cNvPr id="1" name=""/>
+        <p:cNvGrpSpPr/>
+        <p:nvPr/>
+      </p:nvGrpSpPr>
+      <p:grpSpPr/>
+      <p:sp>
+        <p:nvSpPr>
+          <p:cNvPr id="2" name="TextBox 1"/>
+          <p:cNvSpPr txBox="1"/>
+          <p:nvPr/>
+        </p:nvSpPr>
+        <p:spPr>
+          <a:xfrm>
+            <a:off x="457200" y="274320"/>
+            <a:ext cx="8229600" cy="640080"/>
+          </a:xfrm>
+          <a:prstGeom prst="rect">
+            <a:avLst/>
+          </a:prstGeom>
+          <a:noFill/>
+        </p:spPr>
+        <p:txBody>
+          <a:bodyPr wrap="square">
+            <a:spAutoFit/>
+          </a:bodyPr>
+          <a:lstStyle/>
+          <a:p>
+            <a:r>
+              <a:rPr sz="2200" b="1">
+                <a:solidFill>
+                  <a:srgbClr val="0B3D2E"/>
+                </a:solidFill>
+              </a:rPr>
+              <a:t>Diagrama 1</a:t>
+            </a:r>
+          </a:p>
+        </p:txBody>
+      </p:sp>
+      <p:pic>
+        <p:nvPicPr>
+          <p:cNvPr id="3" name="Picture 2" descr="119e04fa6d095b5c.png"/>
+          <p:cNvPicPr>
+            <a:picLocks noChangeAspect="1"/>
+          </p:cNvPicPr>
+          <p:nvPr/>
+        </p:nvPicPr>
+        <p:blipFill>
+          <a:blip r:embed="rId2"/>
+          <a:stretch>
+            <a:fillRect/>
+          </a:stretch>
+        </p:blipFill>
+        <p:spPr>
+          <a:xfrm>
+            <a:off x="457200" y="2738628"/>
+            <a:ext cx="8229600" cy="2020824"/>
+          </a:xfrm>
+          <a:prstGeom prst="rect">
+            <a:avLst/>
+          </a:prstGeom>
+        </p:spPr>
+      </p:pic>
+    </p:spTree>
+  </p:cSld>
+  <p:clrMapOvr>
+    <a:masterClrMapping/>
+  </p:clrMapOvr>
+</p:sld>
+</file>
+
+<file path=ppt/slides/slide16.xml><?xml version="1.0" encoding="utf-8"?>
+<p:sld xmlns:a="http://schemas.openxmlformats.org/drawingml/2006/main" xmlns:p="http://schemas.openxmlformats.org/presentationml/2006/main" xmlns:r="http://schemas.openxmlformats.org/officeDocument/2006/relationships">
+  <p:cSld>
+    <p:spTree>
+      <p:nvGrpSpPr>
+        <p:cNvPr id="1" name=""/>
+        <p:cNvGrpSpPr/>
+        <p:nvPr/>
+      </p:nvGrpSpPr>
+      <p:grpSpPr/>
+      <p:sp>
+        <p:nvSpPr>
+          <p:cNvPr id="2" name="TextBox 1"/>
+          <p:cNvSpPr txBox="1"/>
+          <p:nvPr/>
+        </p:nvSpPr>
+        <p:spPr>
+          <a:xfrm>
+            <a:off x="457200" y="274320"/>
+            <a:ext cx="8229600" cy="640080"/>
+          </a:xfrm>
+          <a:prstGeom prst="rect">
+            <a:avLst/>
+          </a:prstGeom>
+          <a:noFill/>
+        </p:spPr>
+        <p:txBody>
+          <a:bodyPr wrap="square">
+            <a:spAutoFit/>
+          </a:bodyPr>
+          <a:lstStyle/>
+          <a:p>
+            <a:r>
+              <a:rPr sz="2200" b="1">
+                <a:solidFill>
+                  <a:srgbClr val="0B3D2E"/>
+                </a:solidFill>
+              </a:rPr>
+              <a:t>Diagrama 2</a:t>
+            </a:r>
+          </a:p>
+        </p:txBody>
+      </p:sp>
+      <p:pic>
+        <p:nvPicPr>
+          <p:cNvPr id="3" name="Picture 2" descr="201fe0b00acdf44d.png"/>
+          <p:cNvPicPr>
+            <a:picLocks noChangeAspect="1"/>
+          </p:cNvPicPr>
+          <p:nvPr/>
+        </p:nvPicPr>
+        <p:blipFill>
+          <a:blip r:embed="rId2"/>
+          <a:stretch>
+            <a:fillRect/>
+          </a:stretch>
+        </p:blipFill>
+        <p:spPr>
+          <a:xfrm>
+            <a:off x="457200" y="3465576"/>
+            <a:ext cx="8229600" cy="566928"/>
+          </a:xfrm>
+          <a:prstGeom prst="rect">
+            <a:avLst/>
+          </a:prstGeom>
+        </p:spPr>
+      </p:pic>
+    </p:spTree>
+  </p:cSld>
+  <p:clrMapOvr>
+    <a:masterClrMapping/>
+  </p:clrMapOvr>
+</p:sld>
+</file>
+
+<file path=ppt/slides/slide17.xml><?xml version="1.0" encoding="utf-8"?>
+<p:sld xmlns:a="http://schemas.openxmlformats.org/drawingml/2006/main" xmlns:p="http://schemas.openxmlformats.org/presentationml/2006/main" xmlns:r="http://schemas.openxmlformats.org/officeDocument/2006/relationships">
+  <p:cSld>
+    <p:spTree>
+      <p:nvGrpSpPr>
+        <p:cNvPr id="1" name=""/>
+        <p:cNvGrpSpPr/>
+        <p:nvPr/>
+      </p:nvGrpSpPr>
+      <p:grpSpPr/>
+      <p:sp>
+        <p:nvSpPr>
+          <p:cNvPr id="2" name="TextBox 1"/>
+          <p:cNvSpPr txBox="1"/>
+          <p:nvPr/>
+        </p:nvSpPr>
+        <p:spPr>
+          <a:xfrm>
+            <a:off x="457200" y="274320"/>
+            <a:ext cx="8229600" cy="640080"/>
+          </a:xfrm>
+          <a:prstGeom prst="rect">
+            <a:avLst/>
+          </a:prstGeom>
+          <a:noFill/>
+        </p:spPr>
+        <p:txBody>
+          <a:bodyPr wrap="square">
+            <a:spAutoFit/>
+          </a:bodyPr>
+          <a:lstStyle/>
+          <a:p>
+            <a:r>
+              <a:rPr sz="2200" b="1">
+                <a:solidFill>
+                  <a:srgbClr val="0B3D2E"/>
+                </a:solidFill>
+              </a:rPr>
+              <a:t>Diagrama 3</a:t>
+            </a:r>
+          </a:p>
+        </p:txBody>
+      </p:sp>
+      <p:pic>
+        <p:nvPicPr>
+          <p:cNvPr id="3" name="Picture 2" descr="caca68f4cbc1a209.png"/>
+          <p:cNvPicPr>
+            <a:picLocks noChangeAspect="1"/>
+          </p:cNvPicPr>
+          <p:nvPr/>
+        </p:nvPicPr>
+        <p:blipFill>
+          <a:blip r:embed="rId2"/>
+          <a:stretch>
+            <a:fillRect/>
+          </a:stretch>
+        </p:blipFill>
+        <p:spPr>
+          <a:xfrm>
+            <a:off x="638853" y="1097280"/>
+            <a:ext cx="7866294" cy="5303520"/>
+          </a:xfrm>
+          <a:prstGeom prst="rect">
+            <a:avLst/>
+          </a:prstGeom>
+        </p:spPr>
+      </p:pic>
     </p:spTree>
   </p:cSld>
   <p:clrMapOvr>
@@ -3653,7 +4196,7 @@
                   <a:srgbClr val="22282E"/>
                 </a:solidFill>
               </a:rPr>
-              <a:t>•  Convertir la terminal en tu herramienta más rápida para procesar texto, logs y salidas de herramientas. Al terminar podrás encadenar comandos con pipes, filtrar con grep, transformar con sed, extraer campos con awk y controlar procesos, habilidades imprescindibles para el análisis de logs y la automatización.</a:t>
+              <a:t>•  Convertir la terminal en tu herramienta más rápida para procesar texto, logs y salidas de otras herramientas, entendiendo por qué funciona y no solo qué teclear. Al terminar podrás encadenar comandos…</a:t>
             </a:r>
           </a:p>
         </p:txBody>
@@ -3757,67 +4300,82 @@
                   <a:srgbClr val="22282E"/>
                 </a:solidFill>
               </a:rPr>
-              <a:t>•  Construir tuberías (pipes) que combinen varios comandos.</a:t>
-            </a:r>
-          </a:p>
-          <a:p>
-            <a:pPr>
-              <a:spcAft>
-                <a:spcPts val="600"/>
-              </a:spcAft>
-            </a:pPr>
-            <a:r>
-              <a:rPr sz="1500">
-                <a:solidFill>
-                  <a:srgbClr val="22282E"/>
-                </a:solidFill>
-              </a:rPr>
-              <a:t>•  Filtrar texto con grep y expresiones regulares básicas.</a:t>
-            </a:r>
-          </a:p>
-          <a:p>
-            <a:pPr>
-              <a:spcAft>
-                <a:spcPts val="600"/>
-              </a:spcAft>
-            </a:pPr>
-            <a:r>
-              <a:rPr sz="1500">
-                <a:solidFill>
-                  <a:srgbClr val="22282E"/>
-                </a:solidFill>
-              </a:rPr>
-              <a:t>•  Transformar flujos con sed (sustitución, borrado, rangos).</a:t>
-            </a:r>
-          </a:p>
-          <a:p>
-            <a:pPr>
-              <a:spcAft>
-                <a:spcPts val="600"/>
-              </a:spcAft>
-            </a:pPr>
-            <a:r>
-              <a:rPr sz="1500">
-                <a:solidFill>
-                  <a:srgbClr val="22282E"/>
-                </a:solidFill>
-              </a:rPr>
-              <a:t>•  Extraer y agregar campos con awk.</a:t>
-            </a:r>
-          </a:p>
-          <a:p>
-            <a:pPr>
-              <a:spcAft>
-                <a:spcPts val="600"/>
-              </a:spcAft>
-            </a:pPr>
-            <a:r>
-              <a:rPr sz="1500">
-                <a:solidFill>
-                  <a:srgbClr val="22282E"/>
-                </a:solidFill>
-              </a:rPr>
-              <a:t>•  Gestionar procesos: listar, priorizar, señales y jobs.</a:t>
+              <a:t>•  Construir tuberías (pipes) que combinen varios comandos siguiendo la filosofía Unix de herramientas pequeñas y componibles.</a:t>
+            </a:r>
+          </a:p>
+          <a:p>
+            <a:pPr>
+              <a:spcAft>
+                <a:spcPts val="600"/>
+              </a:spcAft>
+            </a:pPr>
+            <a:r>
+              <a:rPr sz="1500">
+                <a:solidFill>
+                  <a:srgbClr val="22282E"/>
+                </a:solidFill>
+              </a:rPr>
+              <a:t>•  Filtrar texto con grep y expresiones regulares, distinguiendo BRE de ERE.</a:t>
+            </a:r>
+          </a:p>
+          <a:p>
+            <a:pPr>
+              <a:spcAft>
+                <a:spcPts val="600"/>
+              </a:spcAft>
+            </a:pPr>
+            <a:r>
+              <a:rPr sz="1500">
+                <a:solidFill>
+                  <a:srgbClr val="22282E"/>
+                </a:solidFill>
+              </a:rPr>
+              <a:t>•  Transformar flujos con sed (sustitución, borrado, rangos de direcciones) sin abrir un editor.</a:t>
+            </a:r>
+          </a:p>
+          <a:p>
+            <a:pPr>
+              <a:spcAft>
+                <a:spcPts val="600"/>
+              </a:spcAft>
+            </a:pPr>
+            <a:r>
+              <a:rPr sz="1500">
+                <a:solidFill>
+                  <a:srgbClr val="22282E"/>
+                </a:solidFill>
+              </a:rPr>
+              <a:t>•  Extraer y agregar campos con awk, usando sus variables internas y bloques BEGIN/END.</a:t>
+            </a:r>
+          </a:p>
+          <a:p>
+            <a:pPr>
+              <a:spcAft>
+                <a:spcPts val="600"/>
+              </a:spcAft>
+            </a:pPr>
+            <a:r>
+              <a:rPr sz="1500">
+                <a:solidFill>
+                  <a:srgbClr val="22282E"/>
+                </a:solidFill>
+              </a:rPr>
+              <a:t>•  Gestionar procesos: listarlos, priorizarlos, enviarles señales y controlar jobs en segundo plano.</a:t>
+            </a:r>
+          </a:p>
+          <a:p>
+            <a:pPr>
+              <a:spcAft>
+                <a:spcPts val="600"/>
+              </a:spcAft>
+            </a:pPr>
+            <a:r>
+              <a:rPr sz="1500">
+                <a:solidFill>
+                  <a:srgbClr val="22282E"/>
+                </a:solidFill>
+              </a:rPr>
+              <a:t>•  Diseñar un one-liner de análisis de logs que reduzca datos temprano para ser eficiente sobre archivos grandes.</a:t>
             </a:r>
           </a:p>
         </p:txBody>
@@ -3936,7 +4494,7 @@
                   <a:srgbClr val="22282E"/>
                 </a:solidFill>
               </a:rPr>
-              <a:t>•  3 — grep</a:t>
+              <a:t>•  3 — grep y regex</a:t>
             </a:r>
           </a:p>
           <a:p>
@@ -3996,7 +4554,7 @@
                   <a:srgbClr val="22282E"/>
                 </a:solidFill>
               </a:rPr>
-              <a:t>•  7 — Procesos</a:t>
+              <a:t>•  7 — Procesos y señales</a:t>
             </a:r>
           </a:p>
         </p:txBody>
@@ -4047,7 +4605,7 @@
                   <a:srgbClr val="0B3D2E"/>
                 </a:solidFill>
               </a:rPr>
-              <a:t>📖 Definiciones y características</a:t>
+              <a:t>🧠 Explicación en profundidad</a:t>
             </a:r>
           </a:p>
         </p:txBody>
@@ -4085,82 +4643,97 @@
                   <a:srgbClr val="22282E"/>
                 </a:solidFill>
               </a:rPr>
-              <a:t>•  stdin/stdout/stderr: canales estándar (0, 1, 2). Clave: 2&gt; redirige errores; &gt; y &gt;&gt; escriben/anexan.</a:t>
-            </a:r>
-          </a:p>
-          <a:p>
-            <a:pPr>
-              <a:spcAft>
-                <a:spcPts val="600"/>
-              </a:spcAft>
-            </a:pPr>
-            <a:r>
-              <a:rPr sz="1500">
-                <a:solidFill>
-                  <a:srgbClr val="22282E"/>
-                </a:solidFill>
-              </a:rPr>
-              <a:t>•  Pipe (|): conecta la salida de un comando con la entrada del siguiente. Clave: filosofía Unix de herramientas componibles.</a:t>
-            </a:r>
-          </a:p>
-          <a:p>
-            <a:pPr>
-              <a:spcAft>
-                <a:spcPts val="600"/>
-              </a:spcAft>
-            </a:pPr>
-            <a:r>
-              <a:rPr sz="1500">
-                <a:solidFill>
-                  <a:srgbClr val="22282E"/>
-                </a:solidFill>
-              </a:rPr>
-              <a:t>•  grep: filtra líneas que coinciden con un patrón. Clave: -r recursivo, -i sin distinción de mayúsculas, -E regex extendida.</a:t>
-            </a:r>
-          </a:p>
-          <a:p>
-            <a:pPr>
-              <a:spcAft>
-                <a:spcPts val="600"/>
-              </a:spcAft>
-            </a:pPr>
-            <a:r>
-              <a:rPr sz="1500">
-                <a:solidFill>
-                  <a:srgbClr val="22282E"/>
-                </a:solidFill>
-              </a:rPr>
-              <a:t>•  sed: editor de flujo orientado a líneas. Clave: s/patrón/reemplazo/g es su uso más común.</a:t>
-            </a:r>
-          </a:p>
-          <a:p>
-            <a:pPr>
-              <a:spcAft>
-                <a:spcPts val="600"/>
-              </a:spcAft>
-            </a:pPr>
-            <a:r>
-              <a:rPr sz="1500">
-                <a:solidFill>
-                  <a:srgbClr val="22282E"/>
-                </a:solidFill>
-              </a:rPr>
-              <a:t>•  awk: lenguaje para procesar texto por campos. Clave: $1, $2... son las columnas; NR el número de línea.</a:t>
-            </a:r>
-          </a:p>
-          <a:p>
-            <a:pPr>
-              <a:spcAft>
-                <a:spcPts val="600"/>
-              </a:spcAft>
-            </a:pPr>
-            <a:r>
-              <a:rPr sz="1500">
-                <a:solidFill>
-                  <a:srgbClr val="22282E"/>
-                </a:solidFill>
-              </a:rPr>
-              <a:t>•  Señal: mensaje al proceso (SIGTERM, SIGKILL, SIGHUP). Clave: kill -9 es forzado y no permite limpieza.</a:t>
+              <a:t>•  La potencia de la línea de comandos no viene de un programa monolítico que lo hace todo, sino de decenas de utilidades minúsculas —cada una experta en una sola cosa— que se conectan como piezas de…</a:t>
+            </a:r>
+          </a:p>
+          <a:p>
+            <a:pPr>
+              <a:spcAft>
+                <a:spcPts val="600"/>
+              </a:spcAft>
+            </a:pPr>
+            <a:r>
+              <a:rPr sz="1500">
+                <a:solidFill>
+                  <a:srgbClr val="22282E"/>
+                </a:solidFill>
+              </a:rPr>
+              <a:t>•  Todo proceso en Linux nace con tres canales de comunicación abiertos, identificados por un descriptor de archivo numérico. El descriptor 0 es la entrada estándar (stdin), por donde el proceso lee; el…</a:t>
+            </a:r>
+          </a:p>
+          <a:p>
+            <a:pPr>
+              <a:spcAft>
+                <a:spcPts val="600"/>
+              </a:spcAft>
+            </a:pPr>
+            <a:r>
+              <a:rPr sz="1500">
+                <a:solidFill>
+                  <a:srgbClr val="22282E"/>
+                </a:solidFill>
+              </a:rPr>
+              <a:t>•  Un detalle crítico para el análisis de logs: stderr no viaja por la tubería. Cuando escribes comando | otro, solo stdout entra en el pipe; los errores del primer comando siguen yendo a la terminal.…</a:t>
+            </a:r>
+          </a:p>
+          <a:p>
+            <a:pPr>
+              <a:spcAft>
+                <a:spcPts val="600"/>
+              </a:spcAft>
+            </a:pPr>
+            <a:r>
+              <a:rPr sz="1500">
+                <a:solidFill>
+                  <a:srgbClr val="22282E"/>
+                </a:solidFill>
+              </a:rPr>
+              <a:t>•  Una tubería (|) conecta la salida estándar de un comando con la entrada estándar del siguiente, y ambos se ejecutan concurrentemente: no espera a que el primero termine para empezar el segundo, sino…</a:t>
+            </a:r>
+          </a:p>
+          <a:p>
+            <a:pPr>
+              <a:spcAft>
+                <a:spcPts val="600"/>
+              </a:spcAft>
+            </a:pPr>
+            <a:r>
+              <a:rPr sz="1500">
+                <a:solidFill>
+                  <a:srgbClr val="22282E"/>
+                </a:solidFill>
+              </a:rPr>
+              <a:t>•  Este patrón —extraer un campo, ordenar, contar repeticiones únicas, reordenar por frecuencia y quedarte con los primeros— es el esqueleto de casi todo informe de "top N" que producirás: top de IPs…</a:t>
+            </a:r>
+          </a:p>
+          <a:p>
+            <a:pPr>
+              <a:spcAft>
+                <a:spcPts val="600"/>
+              </a:spcAft>
+            </a:pPr>
+            <a:r>
+              <a:rPr sz="1500">
+                <a:solidFill>
+                  <a:srgbClr val="22282E"/>
+                </a:solidFill>
+              </a:rPr>
+              <a:t>•  grep (global regular expression print) imprime las líneas que coinciden con un patrón. Su verdadero poder está en las expresiones regulares, y aquí hay una distinción que confunde a muchos: grep usa…</a:t>
+            </a:r>
+          </a:p>
+          <a:p>
+            <a:pPr>
+              <a:spcAft>
+                <a:spcPts val="600"/>
+              </a:spcAft>
+            </a:pPr>
+            <a:r>
+              <a:rPr sz="1500">
+                <a:solidFill>
+                  <a:srgbClr val="22282E"/>
+                </a:solidFill>
+              </a:rPr>
+              <a:t>•  sed (stream editor) aplica transformaciones línea a línea sin abrir un editor interactivo, lo que lo hace ideal para automatizar y para procesos reproducibles. Su comando estrella es la sustitución…</a:t>
             </a:r>
           </a:p>
         </p:txBody>
@@ -4211,7 +4784,7 @@
                   <a:srgbClr val="0B3D2E"/>
                 </a:solidFill>
               </a:rPr>
-              <a:t>🧰 Herramientas y preparación</a:t>
+              <a:t>📖 Definiciones y características</a:t>
             </a:r>
           </a:p>
         </p:txBody>
@@ -4249,7 +4822,97 @@
                   <a:srgbClr val="22282E"/>
                 </a:solidFill>
               </a:rPr>
-              <a:t>•  Todo viene de serie en Linux: grep, sed, awk (gawk), sort, uniq, cut, tr, wc, ps, top/htop, kill. Descarga un log de ejemplo (por ejemplo /var/log/auth.log o el access.log de un servidor web) para practicar sobre datos reales.</a:t>
+              <a:t>•  stdin / stdout / stderr: los tres canales estándar de todo proceso, con descriptores 0, 1 y 2. stdin es la entrada, stdout la salida normal y stderr los diagnósticos. Mantenerlos separados permite…</a:t>
+            </a:r>
+          </a:p>
+          <a:p>
+            <a:pPr>
+              <a:spcAft>
+                <a:spcPts val="600"/>
+              </a:spcAft>
+            </a:pPr>
+            <a:r>
+              <a:rPr sz="1500">
+                <a:solidFill>
+                  <a:srgbClr val="22282E"/>
+                </a:solidFill>
+              </a:rPr>
+              <a:t>•  Pipe (|): operador que conecta la stdout de un comando con la stdin del siguiente, ejecutándolos concurrentemente. Encarna la filosofía Unix de componer herramientas pequeñas. Es la base de todo…</a:t>
+            </a:r>
+          </a:p>
+          <a:p>
+            <a:pPr>
+              <a:spcAft>
+                <a:spcPts val="600"/>
+              </a:spcAft>
+            </a:pPr>
+            <a:r>
+              <a:rPr sz="1500">
+                <a:solidFill>
+                  <a:srgbClr val="22282E"/>
+                </a:solidFill>
+              </a:rPr>
+              <a:t>•  grep: filtra e imprime líneas que coinciden con un patrón (regex). Banderas clave: -i (insensible a mayúsculas), -r (recursivo), -v (invertir), -E (regex extendida), -o (solo lo coincidente). Buscar…</a:t>
+            </a:r>
+          </a:p>
+          <a:p>
+            <a:pPr>
+              <a:spcAft>
+                <a:spcPts val="600"/>
+              </a:spcAft>
+            </a:pPr>
+            <a:r>
+              <a:rPr sz="1500">
+                <a:solidFill>
+                  <a:srgbClr val="22282E"/>
+                </a:solidFill>
+              </a:rPr>
+              <a:t>•  Expresión regular (regex): notación para describir conjuntos de cadenas. BRE (por defecto en grep) trata + ? { | ( ) como literales; ERE (-E) les da significado especial. Dominar lo básico multiplica…</a:t>
+            </a:r>
+          </a:p>
+          <a:p>
+            <a:pPr>
+              <a:spcAft>
+                <a:spcPts val="600"/>
+              </a:spcAft>
+            </a:pPr>
+            <a:r>
+              <a:rPr sz="1500">
+                <a:solidFill>
+                  <a:srgbClr val="22282E"/>
+                </a:solidFill>
+              </a:rPr>
+              <a:t>•  sed: editor de flujo orientado a líneas. Su forma más común es s/patrón/reemplazo/g, y entiende direcciones y rangos. Su bandera -i edita en sitio; hazlo con -i.bak para conservar respaldo.</a:t>
+            </a:r>
+          </a:p>
+          <a:p>
+            <a:pPr>
+              <a:spcAft>
+                <a:spcPts val="600"/>
+              </a:spcAft>
+            </a:pPr>
+            <a:r>
+              <a:rPr sz="1500">
+                <a:solidFill>
+                  <a:srgbClr val="22282E"/>
+                </a:solidFill>
+              </a:rPr>
+              <a:t>•  awk: mini-lenguaje para datos por campos. $1..$NF son las columnas, NR el número de línea, FS el separador. Sus bloques BEGIN/END permiten cabeceras y totales en una sola pasada.</a:t>
+            </a:r>
+          </a:p>
+          <a:p>
+            <a:pPr>
+              <a:spcAft>
+                <a:spcPts val="600"/>
+              </a:spcAft>
+            </a:pPr>
+            <a:r>
+              <a:rPr sz="1500">
+                <a:solidFill>
+                  <a:srgbClr val="22282E"/>
+                </a:solidFill>
+              </a:rPr>
+              <a:t>•  Campo y separador (FS): awk parte cada línea en campos usando un separador (espacios por defecto). Con -F: fijas otro delimitador (: para /etc/passwd). Un separador mal elegido es la causa nº1 de…</a:t>
             </a:r>
           </a:p>
         </p:txBody>
@@ -4300,7 +4963,7 @@
                   <a:srgbClr val="0B3D2E"/>
                 </a:solidFill>
               </a:rPr>
-              <a:t>🧪 Laboratorio guiado</a:t>
+              <a:t>📔 Glosario</a:t>
             </a:r>
           </a:p>
         </p:txBody>
@@ -4338,97 +5001,97 @@
                   <a:srgbClr val="22282E"/>
                 </a:solidFill>
               </a:rPr>
-              <a:t>•  Redirección y streams:</a:t>
-            </a:r>
-          </a:p>
-          <a:p>
-            <a:pPr>
-              <a:spcAft>
-                <a:spcPts val="600"/>
-              </a:spcAft>
-            </a:pPr>
-            <a:r>
-              <a:rPr sz="1500">
-                <a:solidFill>
-                  <a:srgbClr val="22282E"/>
-                </a:solidFill>
-              </a:rPr>
-              <a:t>•  ls /noexiste /etc 1&gt;salida.txt 2&gt;errores.txt ; cat errores.txt</a:t>
-            </a:r>
-          </a:p>
-          <a:p>
-            <a:pPr>
-              <a:spcAft>
-                <a:spcPts val="600"/>
-              </a:spcAft>
-            </a:pPr>
-            <a:r>
-              <a:rPr sz="1500">
-                <a:solidFill>
-                  <a:srgbClr val="22282E"/>
-                </a:solidFill>
-              </a:rPr>
-              <a:t>•  Pipes básicas. Cuenta cuántos usuarios hay en el sistema:</a:t>
-            </a:r>
-          </a:p>
-          <a:p>
-            <a:pPr>
-              <a:spcAft>
-                <a:spcPts val="600"/>
-              </a:spcAft>
-            </a:pPr>
-            <a:r>
-              <a:rPr sz="1500">
-                <a:solidFill>
-                  <a:srgbClr val="22282E"/>
-                </a:solidFill>
-              </a:rPr>
-              <a:t>•  cut -d: -f1 /etc/passwd | sort | wc -l</a:t>
-            </a:r>
-          </a:p>
-          <a:p>
-            <a:pPr>
-              <a:spcAft>
-                <a:spcPts val="600"/>
-              </a:spcAft>
-            </a:pPr>
-            <a:r>
-              <a:rPr sz="1500">
-                <a:solidFill>
-                  <a:srgbClr val="22282E"/>
-                </a:solidFill>
-              </a:rPr>
-              <a:t>•  grep en logs. Busca intentos de login fallidos:</a:t>
-            </a:r>
-          </a:p>
-          <a:p>
-            <a:pPr>
-              <a:spcAft>
-                <a:spcPts val="600"/>
-              </a:spcAft>
-            </a:pPr>
-            <a:r>
-              <a:rPr sz="1500">
-                <a:solidFill>
-                  <a:srgbClr val="22282E"/>
-                </a:solidFill>
-              </a:rPr>
-              <a:t>•  grep -i "failed password" /var/log/auth.log | head</a:t>
-            </a:r>
-          </a:p>
-          <a:p>
-            <a:pPr>
-              <a:spcAft>
-                <a:spcPts val="600"/>
-              </a:spcAft>
-            </a:pPr>
-            <a:r>
-              <a:rPr sz="1500">
-                <a:solidFill>
-                  <a:srgbClr val="22282E"/>
-                </a:solidFill>
-              </a:rPr>
-              <a:t>•  Extraer IPs con awk. De esos fallos, saca la IP atacante (ajusta el campo):</a:t>
+              <a:t>•  Término — Definición concisa</a:t>
+            </a:r>
+          </a:p>
+          <a:p>
+            <a:pPr>
+              <a:spcAft>
+                <a:spcPts val="600"/>
+              </a:spcAft>
+            </a:pPr>
+            <a:r>
+              <a:rPr sz="1500">
+                <a:solidFill>
+                  <a:srgbClr val="22282E"/>
+                </a:solidFill>
+              </a:rPr>
+              <a:t>•  stdin (fd 0) — Canal de entrada estándar de un proceso</a:t>
+            </a:r>
+          </a:p>
+          <a:p>
+            <a:pPr>
+              <a:spcAft>
+                <a:spcPts val="600"/>
+              </a:spcAft>
+            </a:pPr>
+            <a:r>
+              <a:rPr sz="1500">
+                <a:solidFill>
+                  <a:srgbClr val="22282E"/>
+                </a:solidFill>
+              </a:rPr>
+              <a:t>•  stdout (fd 1) — Canal de salida normal de un proceso</a:t>
+            </a:r>
+          </a:p>
+          <a:p>
+            <a:pPr>
+              <a:spcAft>
+                <a:spcPts val="600"/>
+              </a:spcAft>
+            </a:pPr>
+            <a:r>
+              <a:rPr sz="1500">
+                <a:solidFill>
+                  <a:srgbClr val="22282E"/>
+                </a:solidFill>
+              </a:rPr>
+              <a:t>•  stderr (fd 2) — Canal de mensajes de error y diagnóstico</a:t>
+            </a:r>
+          </a:p>
+          <a:p>
+            <a:pPr>
+              <a:spcAft>
+                <a:spcPts val="600"/>
+              </a:spcAft>
+            </a:pPr>
+            <a:r>
+              <a:rPr sz="1500">
+                <a:solidFill>
+                  <a:srgbClr val="22282E"/>
+                </a:solidFill>
+              </a:rPr>
+              <a:t>•  Pipe (\ — )</a:t>
+            </a:r>
+          </a:p>
+          <a:p>
+            <a:pPr>
+              <a:spcAft>
+                <a:spcPts val="600"/>
+              </a:spcAft>
+            </a:pPr>
+            <a:r>
+              <a:rPr sz="1500">
+                <a:solidFill>
+                  <a:srgbClr val="22282E"/>
+                </a:solidFill>
+              </a:rPr>
+              <a:t>•  BRE — Basic Regular Expressions (modo por defecto de grep)</a:t>
+            </a:r>
+          </a:p>
+          <a:p>
+            <a:pPr>
+              <a:spcAft>
+                <a:spcPts val="600"/>
+              </a:spcAft>
+            </a:pPr>
+            <a:r>
+              <a:rPr sz="1500">
+                <a:solidFill>
+                  <a:srgbClr val="22282E"/>
+                </a:solidFill>
+              </a:rPr>
+              <a:t>•  ERE — Extended Regular Expressions (activadas con grep -E)</a:t>
             </a:r>
           </a:p>
         </p:txBody>
@@ -4479,7 +5142,7 @@
                   <a:srgbClr val="0B3D2E"/>
                 </a:solidFill>
               </a:rPr>
-              <a:t>✍️ Ejercicios</a:t>
+              <a:t>🧰 Herramientas y preparación</a:t>
             </a:r>
           </a:p>
         </p:txBody>
@@ -4517,82 +5180,7 @@
                   <a:srgbClr val="22282E"/>
                 </a:solidFill>
               </a:rPr>
-              <a:t>•  A partir de un access.log, obtén el top 10 de IPs con más peticiones.</a:t>
-            </a:r>
-          </a:p>
-          <a:p>
-            <a:pPr>
-              <a:spcAft>
-                <a:spcPts val="600"/>
-              </a:spcAft>
-            </a:pPr>
-            <a:r>
-              <a:rPr sz="1500">
-                <a:solidFill>
-                  <a:srgbClr val="22282E"/>
-                </a:solidFill>
-              </a:rPr>
-              <a:t>•  Cuenta cuántas peticiones devolvieron código 404 usando awk.</a:t>
-            </a:r>
-          </a:p>
-          <a:p>
-            <a:pPr>
-              <a:spcAft>
-                <a:spcPts val="600"/>
-              </a:spcAft>
-            </a:pPr>
-            <a:r>
-              <a:rPr sz="1500">
-                <a:solidFill>
-                  <a:srgbClr val="22282E"/>
-                </a:solidFill>
-              </a:rPr>
-              <a:t>•  Con sed, cambia todas las apariciones de http:// por https:// en un archivo.</a:t>
-            </a:r>
-          </a:p>
-          <a:p>
-            <a:pPr>
-              <a:spcAft>
-                <a:spcPts val="600"/>
-              </a:spcAft>
-            </a:pPr>
-            <a:r>
-              <a:rPr sz="1500">
-                <a:solidFill>
-                  <a:srgbClr val="22282E"/>
-                </a:solidFill>
-              </a:rPr>
-              <a:t>•  Extrae solo los nombres de usuario con shell /bin/bash de /etc/passwd.</a:t>
-            </a:r>
-          </a:p>
-          <a:p>
-            <a:pPr>
-              <a:spcAft>
-                <a:spcPts val="600"/>
-              </a:spcAft>
-            </a:pPr>
-            <a:r>
-              <a:rPr sz="1500">
-                <a:solidFill>
-                  <a:srgbClr val="22282E"/>
-                </a:solidFill>
-              </a:rPr>
-              <a:t>•  Muestra los 5 procesos que más memoria consumen, con usuario y PID.</a:t>
-            </a:r>
-          </a:p>
-          <a:p>
-            <a:pPr>
-              <a:spcAft>
-                <a:spcPts val="600"/>
-              </a:spcAft>
-            </a:pPr>
-            <a:r>
-              <a:rPr sz="1500">
-                <a:solidFill>
-                  <a:srgbClr val="22282E"/>
-                </a:solidFill>
-              </a:rPr>
-              <a:t>•  Combina grep, sort y uniq -c para contar user-agents distintos en un log web.</a:t>
+              <a:t>•  Todo lo que necesitas viene de serie en cualquier Linux moderno y en Kali: grep, sed, awk (habitualmente GNU gawk), sort, uniq, cut, tr, wc, ps, top (o el más cómodo htop, instalable con sudo apt…</a:t>
             </a:r>
           </a:p>
         </p:txBody>
@@ -4643,7 +5231,7 @@
                   <a:srgbClr val="0B3D2E"/>
                 </a:solidFill>
               </a:rPr>
-              <a:t>📝 Reto verificable</a:t>
+              <a:t>🧪 Laboratorio guiado</a:t>
             </a:r>
           </a:p>
         </p:txBody>
@@ -4681,22 +5269,97 @@
                   <a:srgbClr val="22282E"/>
                 </a:solidFill>
               </a:rPr>
-              <a:t>•  Escribe una única línea (one-liner) que, a partir de un log de acceso web, produzca un informe ordenado del top 10 de IPs por número de peticiones excluyendo las de tu propia red interna. Documenta cada comando de la tubería.</a:t>
-            </a:r>
-          </a:p>
-          <a:p>
-            <a:pPr>
-              <a:spcAft>
-                <a:spcPts val="600"/>
-              </a:spcAft>
-            </a:pPr>
-            <a:r>
-              <a:rPr sz="1500">
-                <a:solidFill>
-                  <a:srgbClr val="22282E"/>
-                </a:solidFill>
-              </a:rPr>
-              <a:t>•  Criterio de aceptación: el one-liner ejecuta sin errores sobre un access.log real y su salida es una lista de exactamente hasta 10 IPs con su conteo, ordenadas de mayor a menor y sin incluir la subred interna filtrada. Otra persona puede explicar qué hace cada segmento del pipe.</a:t>
+              <a:t>•  Redirección y streams. Observa cómo se separan salida y error:</a:t>
+            </a:r>
+          </a:p>
+          <a:p>
+            <a:pPr>
+              <a:spcAft>
+                <a:spcPts val="600"/>
+              </a:spcAft>
+            </a:pPr>
+            <a:r>
+              <a:rPr sz="1500">
+                <a:solidFill>
+                  <a:srgbClr val="22282E"/>
+                </a:solidFill>
+              </a:rPr>
+              <a:t>•  Pipes básicas. Cuenta cuántos usuarios hay en el sistema:</a:t>
+            </a:r>
+          </a:p>
+          <a:p>
+            <a:pPr>
+              <a:spcAft>
+                <a:spcPts val="600"/>
+              </a:spcAft>
+            </a:pPr>
+            <a:r>
+              <a:rPr sz="1500">
+                <a:solidFill>
+                  <a:srgbClr val="22282E"/>
+                </a:solidFill>
+              </a:rPr>
+              <a:t>•  grep en logs. Busca intentos de inicio de sesión fallidos:</a:t>
+            </a:r>
+          </a:p>
+          <a:p>
+            <a:pPr>
+              <a:spcAft>
+                <a:spcPts val="600"/>
+              </a:spcAft>
+            </a:pPr>
+            <a:r>
+              <a:rPr sz="1500">
+                <a:solidFill>
+                  <a:srgbClr val="22282E"/>
+                </a:solidFill>
+              </a:rPr>
+              <a:t>•  Extraer IPs con awk. De esos fallos, saca la IP atacante y ordénala por frecuencia (ajusta el campo a tu formato de log):</a:t>
+            </a:r>
+          </a:p>
+          <a:p>
+            <a:pPr>
+              <a:spcAft>
+                <a:spcPts val="600"/>
+              </a:spcAft>
+            </a:pPr>
+            <a:r>
+              <a:rPr sz="1500">
+                <a:solidFill>
+                  <a:srgbClr val="22282E"/>
+                </a:solidFill>
+              </a:rPr>
+              <a:t>•  Esto produce un top de IPs por número de intentos: el patrón "reduce, ordena, cuenta, reordena".</a:t>
+            </a:r>
+          </a:p>
+          <a:p>
+            <a:pPr>
+              <a:spcAft>
+                <a:spcPts val="600"/>
+              </a:spcAft>
+            </a:pPr>
+            <a:r>
+              <a:rPr sz="1500">
+                <a:solidFill>
+                  <a:srgbClr val="22282E"/>
+                </a:solidFill>
+              </a:rPr>
+              <a:t>•  sed para limpiar. Elimina comentarios y líneas en blanco de un archivo de configuración:</a:t>
+            </a:r>
+          </a:p>
+          <a:p>
+            <a:pPr>
+              <a:spcAft>
+                <a:spcPts val="600"/>
+              </a:spcAft>
+            </a:pPr>
+            <a:r>
+              <a:rPr sz="1500">
+                <a:solidFill>
+                  <a:srgbClr val="22282E"/>
+                </a:solidFill>
+              </a:rPr>
+              <a:t>•  awk con agregación. Suma el total de bytes servidos en un access.log (campo típico de tamaño en la posición 10 del formato combined):</a:t>
             </a:r>
           </a:p>
         </p:txBody>
